--- a/fall/sem_13_virt/presentations/Семинар_13.pptx
+++ b/fall/sem_13_virt/presentations/Семинар_13.pptx
@@ -5301,9 +5301,9 @@
         <p:grpSpPr>
           <a:xfrm>
             <a:off x="4102206" y="4151618"/>
-            <a:ext cx="2558132" cy="1740935"/>
+            <a:ext cx="2558132" cy="2457512"/>
             <a:chOff x="8753875" y="990599"/>
-            <a:chExt cx="2558132" cy="1740935"/>
+            <a:chExt cx="2558132" cy="2457512"/>
           </a:xfrm>
         </p:grpSpPr>
         <p:sp>
@@ -5320,7 +5320,7 @@
           </p:nvSpPr>
           <p:spPr>
             <a:xfrm>
-              <a:off x="9132827" y="2362202"/>
+              <a:off x="8995735" y="3078779"/>
               <a:ext cx="2057400" cy="369332"/>
             </a:xfrm>
             <a:prstGeom prst="rect">
@@ -6393,6 +6393,68 @@
           </a:p>
         </p:txBody>
       </p:sp>
+      <p:sp>
+        <p:nvSpPr>
+          <p:cNvPr id="99" name="Rectangle 98">
+            <a:extLst>
+              <a:ext uri="{FF2B5EF4-FFF2-40B4-BE49-F238E27FC236}">
+                <a16:creationId xmlns:a16="http://schemas.microsoft.com/office/drawing/2014/main" id="{48A09411-3C8E-45EE-BE40-96696A1541F9}"/>
+              </a:ext>
+            </a:extLst>
+          </p:cNvPr>
+          <p:cNvSpPr/>
+          <p:nvPr/>
+        </p:nvSpPr>
+        <p:spPr>
+          <a:xfrm>
+            <a:off x="4102206" y="5515240"/>
+            <a:ext cx="2558131" cy="484807"/>
+          </a:xfrm>
+          <a:prstGeom prst="rect">
+            <a:avLst/>
+          </a:prstGeom>
+        </p:spPr>
+        <p:style>
+          <a:lnRef idx="2">
+            <a:schemeClr val="accent1">
+              <a:shade val="50000"/>
+            </a:schemeClr>
+          </a:lnRef>
+          <a:fillRef idx="1">
+            <a:schemeClr val="accent1"/>
+          </a:fillRef>
+          <a:effectRef idx="0">
+            <a:schemeClr val="accent1"/>
+          </a:effectRef>
+          <a:fontRef idx="minor">
+            <a:schemeClr val="lt1"/>
+          </a:fontRef>
+        </p:style>
+        <p:txBody>
+          <a:bodyPr rtlCol="0" anchor="ctr"/>
+          <a:lstStyle/>
+          <a:p>
+            <a:pPr algn="ctr"/>
+            <a:r>
+              <a:rPr lang="en-US" sz="1600" dirty="0"/>
+              <a:t>Base::</a:t>
+            </a:r>
+            <a:r>
+              <a:rPr lang="en-US" sz="1600" dirty="0" err="1"/>
+              <a:t>base_not_overriden</a:t>
+            </a:r>
+            <a:r>
+              <a:rPr lang="en-US" sz="1600" dirty="0"/>
+              <a:t>()</a:t>
+            </a:r>
+            <a:endParaRPr lang="ru-RU" sz="1600" dirty="0"/>
+          </a:p>
+          <a:p>
+            <a:pPr algn="ctr"/>
+            <a:endParaRPr lang="ru-RU" dirty="0"/>
+          </a:p>
+        </p:txBody>
+      </p:sp>
     </p:spTree>
     <p:extLst>
       <p:ext uri="{BB962C8B-B14F-4D97-AF65-F5344CB8AC3E}">
